--- a/clase5/teorica_5.pptx
+++ b/clase5/teorica_5.pptx
@@ -8723,8 +8723,8 @@
           </a:prstGeom>
         </p:spPr>
       </p:pic>
-      <mc:AlternateContent xmlns:mc="http://schemas.openxmlformats.org/markup-compatibility/2006">
-        <mc:Choice xmlns:a14="http://schemas.microsoft.com/office/drawing/2010/main" Requires="a14">
+      <mc:AlternateContent xmlns:mc="http://schemas.openxmlformats.org/markup-compatibility/2006" xmlns:a14="http://schemas.microsoft.com/office/drawing/2010/main">
+        <mc:Choice Requires="a14">
           <p:sp>
             <p:nvSpPr>
               <p:cNvPr id="2" name="CuadroTexto 1">
@@ -8978,7 +8978,7 @@
             </p:txBody>
           </p:sp>
         </mc:Choice>
-        <mc:Fallback>
+        <mc:Fallback xmlns="">
           <p:sp>
             <p:nvSpPr>
               <p:cNvPr id="2" name="CuadroTexto 1">
@@ -9071,8 +9071,8 @@
           </a:p>
         </p:txBody>
       </p:sp>
-      <mc:AlternateContent xmlns:mc="http://schemas.openxmlformats.org/markup-compatibility/2006">
-        <mc:Choice xmlns:a14="http://schemas.microsoft.com/office/drawing/2010/main" Requires="a14">
+      <mc:AlternateContent xmlns:mc="http://schemas.openxmlformats.org/markup-compatibility/2006" xmlns:a14="http://schemas.microsoft.com/office/drawing/2010/main">
+        <mc:Choice Requires="a14">
           <p:sp>
             <p:nvSpPr>
               <p:cNvPr id="5" name="CuadroTexto 4">
@@ -9116,17 +9116,7 @@
                           <a:latin typeface="Cambria Math" panose="02040503050406030204" pitchFamily="18" charset="0"/>
                           <a:ea typeface="Cambria Math" panose="02040503050406030204" pitchFamily="18" charset="0"/>
                         </a:rPr>
-                        <m:t>→</m:t>
-                      </m:r>
-                      <m:r>
-                        <a:rPr lang="es-MX" sz="1600" b="0" i="1" smtClean="0">
-                          <a:solidFill>
-                            <a:schemeClr val="accent3"/>
-                          </a:solidFill>
-                          <a:latin typeface="Cambria Math" panose="02040503050406030204" pitchFamily="18" charset="0"/>
-                          <a:ea typeface="Cambria Math" panose="02040503050406030204" pitchFamily="18" charset="0"/>
-                        </a:rPr>
-                        <m:t>0</m:t>
+                        <m:t>→0</m:t>
                       </m:r>
                     </m:oMath>
                   </m:oMathPara>
@@ -9140,7 +9130,7 @@
             </p:txBody>
           </p:sp>
         </mc:Choice>
-        <mc:Fallback>
+        <mc:Fallback xmlns="">
           <p:sp>
             <p:nvSpPr>
               <p:cNvPr id="5" name="CuadroTexto 4">
@@ -9185,8 +9175,8 @@
           </p:sp>
         </mc:Fallback>
       </mc:AlternateContent>
-      <mc:AlternateContent xmlns:mc="http://schemas.openxmlformats.org/markup-compatibility/2006">
-        <mc:Choice xmlns:a14="http://schemas.microsoft.com/office/drawing/2010/main" Requires="a14">
+      <mc:AlternateContent xmlns:mc="http://schemas.openxmlformats.org/markup-compatibility/2006" xmlns:a14="http://schemas.microsoft.com/office/drawing/2010/main">
+        <mc:Choice Requires="a14">
           <p:sp>
             <p:nvSpPr>
               <p:cNvPr id="19" name="CuadroTexto 18">
@@ -9363,7 +9353,7 @@
             </p:txBody>
           </p:sp>
         </mc:Choice>
-        <mc:Fallback>
+        <mc:Fallback xmlns="">
           <p:sp>
             <p:nvSpPr>
               <p:cNvPr id="19" name="CuadroTexto 18">
@@ -9680,8 +9670,8 @@
           </a:p>
         </p:txBody>
       </p:sp>
-      <mc:AlternateContent xmlns:mc="http://schemas.openxmlformats.org/markup-compatibility/2006">
-        <mc:Choice xmlns:a14="http://schemas.microsoft.com/office/drawing/2010/main" Requires="a14">
+      <mc:AlternateContent xmlns:mc="http://schemas.openxmlformats.org/markup-compatibility/2006" xmlns:a14="http://schemas.microsoft.com/office/drawing/2010/main">
+        <mc:Choice Requires="a14">
           <p:sp>
             <p:nvSpPr>
               <p:cNvPr id="5" name="CuadroTexto 4">
@@ -10129,7 +10119,7 @@
             </p:txBody>
           </p:sp>
         </mc:Choice>
-        <mc:Fallback>
+        <mc:Fallback xmlns="">
           <p:sp>
             <p:nvSpPr>
               <p:cNvPr id="5" name="CuadroTexto 4">
@@ -10339,8 +10329,8 @@
         </p:nvSpPr>
         <p:spPr>
           <a:xfrm>
-            <a:off x="311700" y="1290084"/>
-            <a:ext cx="3409695" cy="3715690"/>
+            <a:off x="352460" y="861755"/>
+            <a:ext cx="3629683" cy="3993780"/>
           </a:xfrm>
           <a:prstGeom prst="rect">
             <a:avLst/>
@@ -10348,7 +10338,7 @@
         </p:spPr>
         <p:txBody>
           <a:bodyPr spcFirstLastPara="1" wrap="square" lIns="91425" tIns="91425" rIns="91425" bIns="91425" anchor="t" anchorCtr="0">
-            <a:normAutofit/>
+            <a:normAutofit fontScale="92500"/>
           </a:bodyPr>
           <a:lstStyle/>
           <a:p>
@@ -10360,18 +10350,9 @@
               <a:buChar char="§"/>
             </a:pPr>
             <a:r>
-              <a:rPr lang="es-MX" sz="1600" dirty="0"/>
+              <a:rPr lang="es-MX" sz="1700" dirty="0"/>
               <a:t>Los estimadores de MCO se derivaban de minimizar los errores al cuadrado.</a:t>
             </a:r>
-          </a:p>
-          <a:p>
-            <a:pPr marL="0" indent="0">
-              <a:spcAft>
-                <a:spcPts val="600"/>
-              </a:spcAft>
-              <a:buNone/>
-            </a:pPr>
-            <a:endParaRPr lang="es-MX" sz="1600" dirty="0"/>
           </a:p>
           <a:p>
             <a:pPr marL="285750" indent="-285750">
@@ -10382,7 +10363,7 @@
               <a:buChar char="§"/>
             </a:pPr>
             <a:r>
-              <a:rPr lang="es-MX" sz="1600" dirty="0"/>
+              <a:rPr lang="es-MX" sz="1700" dirty="0"/>
               <a:t>El algoritmo LASSO incorpora una penalidad proporcional al valor absoluto de los coeficientes.</a:t>
             </a:r>
           </a:p>
@@ -10394,30 +10375,20 @@
               <a:buFont typeface="Wingdings" panose="05000000000000000000" pitchFamily="2" charset="2"/>
               <a:buChar char="§"/>
             </a:pPr>
-            <a:endParaRPr lang="es-MX" sz="1600" dirty="0"/>
-          </a:p>
-          <a:p>
-            <a:pPr marL="285750" indent="-285750">
-              <a:spcAft>
-                <a:spcPts val="600"/>
-              </a:spcAft>
-              <a:buFont typeface="Wingdings" panose="05000000000000000000" pitchFamily="2" charset="2"/>
-              <a:buChar char="§"/>
-            </a:pPr>
-            <a:r>
-              <a:rPr lang="es-MX" sz="1600" dirty="0"/>
-              <a:t>Se puede aplicar </a:t>
-            </a:r>
-            <a:r>
-              <a:rPr lang="es-MX" sz="1600" dirty="0">
+            <a:r>
+              <a:rPr lang="es-MX" sz="1700" dirty="0"/>
+              <a:t>Se puede aplicar tanto a regresión </a:t>
+            </a:r>
+            <a:r>
+              <a:rPr lang="es-MX" sz="1700" dirty="0">
                 <a:highlight>
                   <a:srgbClr val="63D297"/>
                 </a:highlight>
               </a:rPr>
-              <a:t>tanto a regresión lineal como logística</a:t>
-            </a:r>
-            <a:r>
-              <a:rPr lang="es-MX" sz="1600" dirty="0"/>
+              <a:t>lineal como logística</a:t>
+            </a:r>
+            <a:r>
+              <a:rPr lang="es-MX" sz="1700" dirty="0"/>
               <a:t>.</a:t>
             </a:r>
           </a:p>
@@ -10429,7 +10400,10 @@
               <a:buFont typeface="Wingdings" panose="05000000000000000000" pitchFamily="2" charset="2"/>
               <a:buChar char="§"/>
             </a:pPr>
-            <a:endParaRPr lang="es-MX" sz="1600" dirty="0"/>
+            <a:r>
+              <a:rPr lang="es-MX" sz="1700" dirty="0"/>
+              <a:t>Un punto importante es que, como vamos a sumar coeficientes de variables distintas, es necesario estandarizarlas antes de estimar.</a:t>
+            </a:r>
           </a:p>
           <a:p>
             <a:pPr marL="285750" indent="-285750">
@@ -10499,7 +10473,7 @@
             </p:nvSpPr>
             <p:spPr>
               <a:xfrm>
-                <a:off x="3926950" y="1346779"/>
+                <a:off x="4219540" y="1331273"/>
                 <a:ext cx="4572000" cy="932628"/>
               </a:xfrm>
               <a:prstGeom prst="rect">
@@ -10828,7 +10802,7 @@
             </p:nvSpPr>
             <p:spPr>
               <a:xfrm>
-                <a:off x="3926950" y="1346779"/>
+                <a:off x="4219540" y="1331273"/>
                 <a:ext cx="4572000" cy="932628"/>
               </a:xfrm>
               <a:prstGeom prst="rect">
@@ -10870,7 +10844,7 @@
         </p:nvSpPr>
         <p:spPr>
           <a:xfrm rot="16200000">
-            <a:off x="5816013" y="528844"/>
+            <a:off x="6108603" y="513338"/>
             <a:ext cx="214170" cy="1522480"/>
           </a:xfrm>
           <a:prstGeom prst="rightBrace">
@@ -10919,7 +10893,7 @@
             </p:nvSpPr>
             <p:spPr>
               <a:xfrm>
-                <a:off x="5693227" y="861755"/>
+                <a:off x="5985817" y="846249"/>
                 <a:ext cx="459741" cy="276999"/>
               </a:xfrm>
               <a:prstGeom prst="rect">
@@ -10933,6 +10907,7 @@
               </a:bodyPr>
               <a:lstStyle/>
               <a:p>
+                <a:pPr/>
                 <a14:m>
                   <m:oMathPara xmlns:m="http://schemas.openxmlformats.org/officeDocument/2006/math">
                     <m:oMathParaPr>
@@ -10977,7 +10952,7 @@
             </p:nvSpPr>
             <p:spPr>
               <a:xfrm>
-                <a:off x="5693227" y="861755"/>
+                <a:off x="5985817" y="846249"/>
                 <a:ext cx="459741" cy="276999"/>
               </a:xfrm>
               <a:prstGeom prst="rect">
@@ -10986,7 +10961,7 @@
               <a:blipFill>
                 <a:blip r:embed="rId4"/>
                 <a:stretch>
-                  <a:fillRect l="-12000" r="-9333" b="-8696"/>
+                  <a:fillRect l="-12000" r="-9333" b="-8889"/>
                 </a:stretch>
               </a:blipFill>
             </p:spPr>
@@ -11021,7 +10996,7 @@
             </p:nvSpPr>
             <p:spPr>
               <a:xfrm>
-                <a:off x="3866968" y="2571750"/>
+                <a:off x="4159558" y="2350688"/>
                 <a:ext cx="4572000" cy="967444"/>
               </a:xfrm>
               <a:prstGeom prst="rect">
@@ -11455,7 +11430,7 @@
             </p:nvSpPr>
             <p:spPr>
               <a:xfrm>
-                <a:off x="3866968" y="2571750"/>
+                <a:off x="4159558" y="2350688"/>
                 <a:ext cx="4572000" cy="967444"/>
               </a:xfrm>
               <a:prstGeom prst="rect">
@@ -11497,7 +11472,7 @@
         </p:nvSpPr>
         <p:spPr>
           <a:xfrm rot="5400000">
-            <a:off x="5085651" y="2855987"/>
+            <a:off x="5378241" y="2634925"/>
             <a:ext cx="214170" cy="1522480"/>
           </a:xfrm>
           <a:prstGeom prst="rightBrace">
@@ -11546,7 +11521,7 @@
             </p:nvSpPr>
             <p:spPr>
               <a:xfrm>
-                <a:off x="4962866" y="3763570"/>
+                <a:off x="5255456" y="3542508"/>
                 <a:ext cx="459741" cy="276999"/>
               </a:xfrm>
               <a:prstGeom prst="rect">
@@ -11560,6 +11535,7 @@
               </a:bodyPr>
               <a:lstStyle/>
               <a:p>
+                <a:pPr/>
                 <a14:m>
                   <m:oMathPara xmlns:m="http://schemas.openxmlformats.org/officeDocument/2006/math">
                     <m:oMathParaPr>
@@ -11604,7 +11580,7 @@
             </p:nvSpPr>
             <p:spPr>
               <a:xfrm>
-                <a:off x="4962866" y="3763570"/>
+                <a:off x="5255456" y="3542508"/>
                 <a:ext cx="459741" cy="276999"/>
               </a:xfrm>
               <a:prstGeom prst="rect">
@@ -11646,7 +11622,7 @@
         </p:nvSpPr>
         <p:spPr>
           <a:xfrm rot="5400000">
-            <a:off x="6547494" y="3115616"/>
+            <a:off x="6840084" y="2894554"/>
             <a:ext cx="253428" cy="1042479"/>
           </a:xfrm>
           <a:prstGeom prst="rightBrace">
@@ -11693,7 +11669,7 @@
         </p:nvSpPr>
         <p:spPr>
           <a:xfrm>
-            <a:off x="6058789" y="3724312"/>
+            <a:off x="6351379" y="3503250"/>
             <a:ext cx="1251097" cy="338554"/>
           </a:xfrm>
           <a:prstGeom prst="rect">
@@ -11810,8 +11786,8 @@
           </a:p>
         </p:txBody>
       </p:sp>
-      <mc:AlternateContent xmlns:mc="http://schemas.openxmlformats.org/markup-compatibility/2006">
-        <mc:Choice xmlns:a14="http://schemas.microsoft.com/office/drawing/2010/main" Requires="a14">
+      <mc:AlternateContent xmlns:mc="http://schemas.openxmlformats.org/markup-compatibility/2006" xmlns:a14="http://schemas.microsoft.com/office/drawing/2010/main">
+        <mc:Choice Requires="a14">
           <p:sp>
             <p:nvSpPr>
               <p:cNvPr id="6" name="Google Shape;182;p31">
@@ -11872,13 +11848,7 @@
                       <a:rPr lang="es-MX" sz="1600" i="1" dirty="0" smtClean="0">
                         <a:latin typeface="Cambria Math" panose="02040503050406030204" pitchFamily="18" charset="0"/>
                       </a:rPr>
-                      <m:t>≥</m:t>
-                    </m:r>
-                    <m:r>
-                      <a:rPr lang="es-MX" sz="1600" i="1" dirty="0" smtClean="0">
-                        <a:latin typeface="Cambria Math" panose="02040503050406030204" pitchFamily="18" charset="0"/>
-                      </a:rPr>
-                      <m:t>0</m:t>
+                      <m:t>≥0</m:t>
                     </m:r>
                   </m:oMath>
                 </a14:m>
@@ -12119,7 +12089,7 @@
             </p:txBody>
           </p:sp>
         </mc:Choice>
-        <mc:Fallback>
+        <mc:Fallback xmlns="">
           <p:sp>
             <p:nvSpPr>
               <p:cNvPr id="6" name="Google Shape;182;p31">
@@ -12166,8 +12136,8 @@
           </p:sp>
         </mc:Fallback>
       </mc:AlternateContent>
-      <mc:AlternateContent xmlns:mc="http://schemas.openxmlformats.org/markup-compatibility/2006">
-        <mc:Choice xmlns:a14="http://schemas.microsoft.com/office/drawing/2010/main" Requires="a14">
+      <mc:AlternateContent xmlns:mc="http://schemas.openxmlformats.org/markup-compatibility/2006" xmlns:a14="http://schemas.microsoft.com/office/drawing/2010/main">
+        <mc:Choice Requires="a14">
           <p:sp>
             <p:nvSpPr>
               <p:cNvPr id="2" name="CuadroTexto 1">
@@ -12196,6 +12166,7 @@
               </a:bodyPr>
               <a:lstStyle/>
               <a:p>
+                <a:pPr/>
                 <a14:m>
                   <m:oMathPara xmlns:m="http://schemas.openxmlformats.org/officeDocument/2006/math">
                     <m:oMathParaPr>
@@ -12223,7 +12194,7 @@
             </p:txBody>
           </p:sp>
         </mc:Choice>
-        <mc:Fallback>
+        <mc:Fallback xmlns="">
           <p:sp>
             <p:nvSpPr>
               <p:cNvPr id="2" name="CuadroTexto 1">
@@ -17669,8 +17640,8 @@
           </a:p>
         </p:txBody>
       </p:sp>
-      <mc:AlternateContent xmlns:mc="http://schemas.openxmlformats.org/markup-compatibility/2006">
-        <mc:Choice xmlns:a14="http://schemas.microsoft.com/office/drawing/2010/main" Requires="a14">
+      <mc:AlternateContent xmlns:mc="http://schemas.openxmlformats.org/markup-compatibility/2006" xmlns:a14="http://schemas.microsoft.com/office/drawing/2010/main">
+        <mc:Choice Requires="a14">
           <p:sp>
             <p:nvSpPr>
               <p:cNvPr id="6" name="Google Shape;182;p31">
@@ -17878,7 +17849,7 @@
             </p:txBody>
           </p:sp>
         </mc:Choice>
-        <mc:Fallback>
+        <mc:Fallback xmlns="">
           <p:sp>
             <p:nvSpPr>
               <p:cNvPr id="6" name="Google Shape;182;p31">
@@ -18268,8 +18239,8 @@
             </a:fontRef>
           </p:style>
         </p:cxnSp>
-        <mc:AlternateContent xmlns:mc="http://schemas.openxmlformats.org/markup-compatibility/2006">
-          <mc:Choice xmlns:a14="http://schemas.microsoft.com/office/drawing/2010/main" Requires="a14">
+        <mc:AlternateContent xmlns:mc="http://schemas.openxmlformats.org/markup-compatibility/2006" xmlns:a14="http://schemas.microsoft.com/office/drawing/2010/main">
+          <mc:Choice Requires="a14">
             <p:sp>
               <p:nvSpPr>
                 <p:cNvPr id="12" name="CuadroTexto 11">
@@ -18362,7 +18333,7 @@
               </p:txBody>
             </p:sp>
           </mc:Choice>
-          <mc:Fallback>
+          <mc:Fallback xmlns="">
             <p:sp>
               <p:nvSpPr>
                 <p:cNvPr id="12" name="CuadroTexto 11">
@@ -18407,8 +18378,8 @@
             </p:sp>
           </mc:Fallback>
         </mc:AlternateContent>
-        <mc:AlternateContent xmlns:mc="http://schemas.openxmlformats.org/markup-compatibility/2006">
-          <mc:Choice xmlns:a14="http://schemas.microsoft.com/office/drawing/2010/main" Requires="a14">
+        <mc:AlternateContent xmlns:mc="http://schemas.openxmlformats.org/markup-compatibility/2006" xmlns:a14="http://schemas.microsoft.com/office/drawing/2010/main">
+          <mc:Choice Requires="a14">
             <p:sp>
               <p:nvSpPr>
                 <p:cNvPr id="13" name="CuadroTexto 12">
@@ -18490,7 +18461,7 @@
               </p:txBody>
             </p:sp>
           </mc:Choice>
-          <mc:Fallback>
+          <mc:Fallback xmlns="">
             <p:sp>
               <p:nvSpPr>
                 <p:cNvPr id="13" name="CuadroTexto 12">
@@ -18878,8 +18849,8 @@
             <a:chExt cx="2912648" cy="667503"/>
           </a:xfrm>
         </p:grpSpPr>
-        <mc:AlternateContent xmlns:mc="http://schemas.openxmlformats.org/markup-compatibility/2006">
-          <mc:Choice xmlns:a14="http://schemas.microsoft.com/office/drawing/2010/main" Requires="a14">
+        <mc:AlternateContent xmlns:mc="http://schemas.openxmlformats.org/markup-compatibility/2006" xmlns:a14="http://schemas.microsoft.com/office/drawing/2010/main">
+          <mc:Choice Requires="a14">
             <p:sp>
               <p:nvSpPr>
                 <p:cNvPr id="5" name="CuadroTexto 4">
@@ -18908,6 +18879,7 @@
                 </a:bodyPr>
                 <a:lstStyle/>
                 <a:p>
+                  <a:pPr/>
                   <a14:m>
                     <m:oMathPara xmlns:m="http://schemas.openxmlformats.org/officeDocument/2006/math">
                       <m:oMathParaPr>
@@ -18917,7 +18889,7 @@
                         <m:sSub>
                           <m:sSubPr>
                             <m:ctrlPr>
-                              <a:rPr lang="es-MX" b="0" i="0" smtClean="0">
+                              <a:rPr lang="es-MX" b="0" i="1" smtClean="0">
                                 <a:solidFill>
                                   <a:schemeClr val="accent3"/>
                                 </a:solidFill>
@@ -18984,7 +18956,7 @@
               </p:txBody>
             </p:sp>
           </mc:Choice>
-          <mc:Fallback>
+          <mc:Fallback xmlns="">
             <p:sp>
               <p:nvSpPr>
                 <p:cNvPr id="5" name="CuadroTexto 4">
@@ -19029,8 +19001,8 @@
             </p:sp>
           </mc:Fallback>
         </mc:AlternateContent>
-        <mc:AlternateContent xmlns:mc="http://schemas.openxmlformats.org/markup-compatibility/2006">
-          <mc:Choice xmlns:a14="http://schemas.microsoft.com/office/drawing/2010/main" Requires="a14">
+        <mc:AlternateContent xmlns:mc="http://schemas.openxmlformats.org/markup-compatibility/2006" xmlns:a14="http://schemas.microsoft.com/office/drawing/2010/main">
+          <mc:Choice Requires="a14">
             <p:sp>
               <p:nvSpPr>
                 <p:cNvPr id="8" name="CuadroTexto 7">
@@ -19059,6 +19031,7 @@
                 </a:bodyPr>
                 <a:lstStyle/>
                 <a:p>
+                  <a:pPr/>
                   <a14:m>
                     <m:oMathPara xmlns:m="http://schemas.openxmlformats.org/officeDocument/2006/math">
                       <m:oMathParaPr>
@@ -19068,7 +19041,7 @@
                         <m:sSub>
                           <m:sSubPr>
                             <m:ctrlPr>
-                              <a:rPr lang="es-MX" b="0" i="0" smtClean="0">
+                              <a:rPr lang="es-MX" b="0" i="1" smtClean="0">
                                 <a:solidFill>
                                   <a:schemeClr val="accent3"/>
                                 </a:solidFill>
@@ -19135,7 +19108,7 @@
               </p:txBody>
             </p:sp>
           </mc:Choice>
-          <mc:Fallback>
+          <mc:Fallback xmlns="">
             <p:sp>
               <p:nvSpPr>
                 <p:cNvPr id="8" name="CuadroTexto 7">
@@ -19180,8 +19153,8 @@
             </p:sp>
           </mc:Fallback>
         </mc:AlternateContent>
-        <mc:AlternateContent xmlns:mc="http://schemas.openxmlformats.org/markup-compatibility/2006">
-          <mc:Choice xmlns:a14="http://schemas.microsoft.com/office/drawing/2010/main" Requires="a14">
+        <mc:AlternateContent xmlns:mc="http://schemas.openxmlformats.org/markup-compatibility/2006" xmlns:a14="http://schemas.microsoft.com/office/drawing/2010/main">
+          <mc:Choice Requires="a14">
             <p:sp>
               <p:nvSpPr>
                 <p:cNvPr id="9" name="CuadroTexto 8">
@@ -19210,6 +19183,7 @@
                 </a:bodyPr>
                 <a:lstStyle/>
                 <a:p>
+                  <a:pPr/>
                   <a14:m>
                     <m:oMathPara xmlns:m="http://schemas.openxmlformats.org/officeDocument/2006/math">
                       <m:oMathParaPr>
@@ -19219,7 +19193,7 @@
                         <m:sSub>
                           <m:sSubPr>
                             <m:ctrlPr>
-                              <a:rPr lang="es-MX" b="0" i="0" smtClean="0">
+                              <a:rPr lang="es-MX" b="0" i="1" smtClean="0">
                                 <a:solidFill>
                                   <a:schemeClr val="accent3"/>
                                 </a:solidFill>
@@ -19286,7 +19260,7 @@
               </p:txBody>
             </p:sp>
           </mc:Choice>
-          <mc:Fallback>
+          <mc:Fallback xmlns="">
             <p:sp>
               <p:nvSpPr>
                 <p:cNvPr id="9" name="CuadroTexto 8">
@@ -19331,8 +19305,8 @@
             </p:sp>
           </mc:Fallback>
         </mc:AlternateContent>
-        <mc:AlternateContent xmlns:mc="http://schemas.openxmlformats.org/markup-compatibility/2006">
-          <mc:Choice xmlns:a14="http://schemas.microsoft.com/office/drawing/2010/main" Requires="a14">
+        <mc:AlternateContent xmlns:mc="http://schemas.openxmlformats.org/markup-compatibility/2006" xmlns:a14="http://schemas.microsoft.com/office/drawing/2010/main">
+          <mc:Choice Requires="a14">
             <p:sp>
               <p:nvSpPr>
                 <p:cNvPr id="10" name="CuadroTexto 9">
@@ -19361,6 +19335,7 @@
                 </a:bodyPr>
                 <a:lstStyle/>
                 <a:p>
+                  <a:pPr/>
                   <a14:m>
                     <m:oMathPara xmlns:m="http://schemas.openxmlformats.org/officeDocument/2006/math">
                       <m:oMathParaPr>
@@ -19370,7 +19345,7 @@
                         <m:sSub>
                           <m:sSubPr>
                             <m:ctrlPr>
-                              <a:rPr lang="es-MX" b="0" i="0" smtClean="0">
+                              <a:rPr lang="es-MX" b="0" i="1" smtClean="0">
                                 <a:solidFill>
                                   <a:schemeClr val="accent3"/>
                                 </a:solidFill>
@@ -19437,7 +19412,7 @@
                         <m:sSub>
                           <m:sSubPr>
                             <m:ctrlPr>
-                              <a:rPr lang="es-MX" b="0" i="0" smtClean="0">
+                              <a:rPr lang="es-MX" b="0" i="1" smtClean="0">
                                 <a:solidFill>
                                   <a:schemeClr val="accent3"/>
                                 </a:solidFill>
@@ -19483,7 +19458,7 @@
               </p:txBody>
             </p:sp>
           </mc:Choice>
-          <mc:Fallback>
+          <mc:Fallback xmlns="">
             <p:sp>
               <p:nvSpPr>
                 <p:cNvPr id="10" name="CuadroTexto 9">
@@ -19528,8 +19503,8 @@
             </p:sp>
           </mc:Fallback>
         </mc:AlternateContent>
-        <mc:AlternateContent xmlns:mc="http://schemas.openxmlformats.org/markup-compatibility/2006">
-          <mc:Choice xmlns:a14="http://schemas.microsoft.com/office/drawing/2010/main" Requires="a14">
+        <mc:AlternateContent xmlns:mc="http://schemas.openxmlformats.org/markup-compatibility/2006" xmlns:a14="http://schemas.microsoft.com/office/drawing/2010/main">
+          <mc:Choice Requires="a14">
             <p:sp>
               <p:nvSpPr>
                 <p:cNvPr id="11" name="CuadroTexto 10">
@@ -19558,6 +19533,7 @@
                 </a:bodyPr>
                 <a:lstStyle/>
                 <a:p>
+                  <a:pPr/>
                   <a14:m>
                     <m:oMathPara xmlns:m="http://schemas.openxmlformats.org/officeDocument/2006/math">
                       <m:oMathParaPr>
@@ -19567,7 +19543,7 @@
                         <m:sSub>
                           <m:sSubPr>
                             <m:ctrlPr>
-                              <a:rPr lang="es-MX" b="0" i="0" smtClean="0">
+                              <a:rPr lang="es-MX" b="0" i="1" smtClean="0">
                                 <a:solidFill>
                                   <a:schemeClr val="accent3"/>
                                 </a:solidFill>
@@ -19634,7 +19610,7 @@
                         <m:sSub>
                           <m:sSubPr>
                             <m:ctrlPr>
-                              <a:rPr lang="es-MX" b="0" i="0" smtClean="0">
+                              <a:rPr lang="es-MX" b="0" i="1" smtClean="0">
                                 <a:solidFill>
                                   <a:schemeClr val="accent3"/>
                                 </a:solidFill>
@@ -19680,7 +19656,7 @@
               </p:txBody>
             </p:sp>
           </mc:Choice>
-          <mc:Fallback>
+          <mc:Fallback xmlns="">
             <p:sp>
               <p:nvSpPr>
                 <p:cNvPr id="11" name="CuadroTexto 10">
@@ -19725,8 +19701,8 @@
             </p:sp>
           </mc:Fallback>
         </mc:AlternateContent>
-        <mc:AlternateContent xmlns:mc="http://schemas.openxmlformats.org/markup-compatibility/2006">
-          <mc:Choice xmlns:a14="http://schemas.microsoft.com/office/drawing/2010/main" Requires="a14">
+        <mc:AlternateContent xmlns:mc="http://schemas.openxmlformats.org/markup-compatibility/2006" xmlns:a14="http://schemas.microsoft.com/office/drawing/2010/main">
+          <mc:Choice Requires="a14">
             <p:sp>
               <p:nvSpPr>
                 <p:cNvPr id="12" name="CuadroTexto 11">
@@ -19755,6 +19731,7 @@
                 </a:bodyPr>
                 <a:lstStyle/>
                 <a:p>
+                  <a:pPr/>
                   <a14:m>
                     <m:oMathPara xmlns:m="http://schemas.openxmlformats.org/officeDocument/2006/math">
                       <m:oMathParaPr>
@@ -19764,7 +19741,7 @@
                         <m:sSub>
                           <m:sSubPr>
                             <m:ctrlPr>
-                              <a:rPr lang="es-MX" b="0" i="0" smtClean="0">
+                              <a:rPr lang="es-MX" b="0" i="1" smtClean="0">
                                 <a:solidFill>
                                   <a:schemeClr val="accent3"/>
                                 </a:solidFill>
@@ -19831,7 +19808,7 @@
                         <m:sSub>
                           <m:sSubPr>
                             <m:ctrlPr>
-                              <a:rPr lang="es-MX" b="0" i="0" smtClean="0">
+                              <a:rPr lang="es-MX" b="0" i="1" smtClean="0">
                                 <a:solidFill>
                                   <a:schemeClr val="accent3"/>
                                 </a:solidFill>
@@ -19877,7 +19854,7 @@
               </p:txBody>
             </p:sp>
           </mc:Choice>
-          <mc:Fallback>
+          <mc:Fallback xmlns="">
             <p:sp>
               <p:nvSpPr>
                 <p:cNvPr id="12" name="CuadroTexto 11">
@@ -19922,8 +19899,8 @@
             </p:sp>
           </mc:Fallback>
         </mc:AlternateContent>
-        <mc:AlternateContent xmlns:mc="http://schemas.openxmlformats.org/markup-compatibility/2006">
-          <mc:Choice xmlns:a14="http://schemas.microsoft.com/office/drawing/2010/main" Requires="a14">
+        <mc:AlternateContent xmlns:mc="http://schemas.openxmlformats.org/markup-compatibility/2006" xmlns:a14="http://schemas.microsoft.com/office/drawing/2010/main">
+          <mc:Choice Requires="a14">
             <p:sp>
               <p:nvSpPr>
                 <p:cNvPr id="13" name="CuadroTexto 12">
@@ -19952,6 +19929,7 @@
                 </a:bodyPr>
                 <a:lstStyle/>
                 <a:p>
+                  <a:pPr/>
                   <a14:m>
                     <m:oMathPara xmlns:m="http://schemas.openxmlformats.org/officeDocument/2006/math">
                       <m:oMathParaPr>
@@ -19961,7 +19939,7 @@
                         <m:sSub>
                           <m:sSubPr>
                             <m:ctrlPr>
-                              <a:rPr lang="es-MX" b="0" i="0" smtClean="0">
+                              <a:rPr lang="es-MX" b="0" i="1" smtClean="0">
                                 <a:solidFill>
                                   <a:schemeClr val="accent3"/>
                                 </a:solidFill>
@@ -20028,7 +20006,7 @@
                         <m:sSub>
                           <m:sSubPr>
                             <m:ctrlPr>
-                              <a:rPr lang="es-MX" b="0" i="0" smtClean="0">
+                              <a:rPr lang="es-MX" b="0" i="1" smtClean="0">
                                 <a:solidFill>
                                   <a:schemeClr val="accent3"/>
                                 </a:solidFill>
@@ -20074,7 +20052,7 @@
                         <m:sSub>
                           <m:sSubPr>
                             <m:ctrlPr>
-                              <a:rPr lang="es-MX" b="0" i="0" smtClean="0">
+                              <a:rPr lang="es-MX" b="0" i="1" smtClean="0">
                                 <a:solidFill>
                                   <a:schemeClr val="accent3"/>
                                 </a:solidFill>
@@ -20120,7 +20098,7 @@
               </p:txBody>
             </p:sp>
           </mc:Choice>
-          <mc:Fallback>
+          <mc:Fallback xmlns="">
             <p:sp>
               <p:nvSpPr>
                 <p:cNvPr id="13" name="CuadroTexto 12">
